--- a/class/cloud_infra_mgmt/06주차_Kubernetes핵심2/01_강의자료/1차시_ConfigMap과Secret.pptx
+++ b/class/cloud_infra_mgmt/06주차_Kubernetes핵심2/01_강의자료/1차시_ConfigMap과Secret.pptx
@@ -5080,7 +5080,7 @@
           <a:p>
             <a:pPr>
               <a:lnSpc>
-                <a:spcPct val="115000"/>
+                <a:spcPct val="149500"/>
               </a:lnSpc>
             </a:pPr>
             <a:r>
@@ -5105,7 +5105,7 @@
           <a:p>
             <a:pPr>
               <a:lnSpc>
-                <a:spcPct val="115000"/>
+                <a:spcPct val="149500"/>
               </a:lnSpc>
             </a:pPr>
             <a:r>
@@ -5130,7 +5130,7 @@
           <a:p>
             <a:pPr>
               <a:lnSpc>
-                <a:spcPct val="115000"/>
+                <a:spcPct val="149500"/>
               </a:lnSpc>
             </a:pPr>
             <a:r>
@@ -6379,16 +6379,104 @@
       </p:sp>
       <p:sp>
         <p:nvSpPr>
-          <p:cNvPr id="7" name="Isosceles Triangle 6"/>
+          <p:cNvPr id="7" name="Rectangle 6"/>
           <p:cNvSpPr/>
           <p:nvPr/>
         </p:nvSpPr>
         <p:spPr>
-          <a:xfrm rot="5400000">
-            <a:off x="3495751" y="1673352"/>
-            <a:ext cx="146304" cy="146304"/>
-          </a:xfrm>
-          <a:prstGeom prst="triangle">
+          <a:xfrm>
+            <a:off x="5096865" y="1730959"/>
+            <a:ext cx="1995220" cy="31089"/>
+          </a:xfrm>
+          <a:prstGeom prst="rect">
+            <a:avLst/>
+          </a:prstGeom>
+          <a:solidFill>
+            <a:srgbClr val="14B8A6"/>
+          </a:solidFill>
+          <a:ln>
+            <a:noFill/>
+          </a:ln>
+          <a:effectLst/>
+        </p:spPr>
+        <p:style>
+          <a:lnRef idx="1">
+            <a:schemeClr val="accent1"/>
+          </a:lnRef>
+          <a:fillRef idx="3">
+            <a:schemeClr val="accent1"/>
+          </a:fillRef>
+          <a:effectRef idx="2">
+            <a:schemeClr val="accent1"/>
+          </a:effectRef>
+          <a:fontRef idx="minor">
+            <a:schemeClr val="lt1"/>
+          </a:fontRef>
+        </p:style>
+        <p:txBody>
+          <a:bodyPr rtlCol="0" anchor="ctr"/>
+          <a:lstStyle/>
+          <a:p>
+            <a:pPr algn="ctr"/>
+          </a:p>
+        </p:txBody>
+      </p:sp>
+      <p:sp>
+        <p:nvSpPr>
+          <p:cNvPr id="8" name="Rectangle 7"/>
+          <p:cNvSpPr/>
+          <p:nvPr/>
+        </p:nvSpPr>
+        <p:spPr>
+          <a:xfrm>
+            <a:off x="7622438" y="1730959"/>
+            <a:ext cx="1995220" cy="31089"/>
+          </a:xfrm>
+          <a:prstGeom prst="rect">
+            <a:avLst/>
+          </a:prstGeom>
+          <a:solidFill>
+            <a:srgbClr val="14B8A6"/>
+          </a:solidFill>
+          <a:ln>
+            <a:noFill/>
+          </a:ln>
+          <a:effectLst/>
+        </p:spPr>
+        <p:style>
+          <a:lnRef idx="1">
+            <a:schemeClr val="accent1"/>
+          </a:lnRef>
+          <a:fillRef idx="3">
+            <a:schemeClr val="accent1"/>
+          </a:fillRef>
+          <a:effectRef idx="2">
+            <a:schemeClr val="accent1"/>
+          </a:effectRef>
+          <a:fontRef idx="minor">
+            <a:schemeClr val="lt1"/>
+          </a:fontRef>
+        </p:style>
+        <p:txBody>
+          <a:bodyPr rtlCol="0" anchor="ctr"/>
+          <a:lstStyle/>
+          <a:p>
+            <a:pPr algn="ctr"/>
+          </a:p>
+        </p:txBody>
+      </p:sp>
+      <p:sp>
+        <p:nvSpPr>
+          <p:cNvPr id="9" name="Oval 8"/>
+          <p:cNvSpPr/>
+          <p:nvPr/>
+        </p:nvSpPr>
+        <p:spPr>
+          <a:xfrm>
+            <a:off x="2040940" y="1481328"/>
+            <a:ext cx="530352" cy="530352"/>
+          </a:xfrm>
+          <a:prstGeom prst="ellipse">
             <a:avLst/>
           </a:prstGeom>
           <a:solidFill>
@@ -6423,227 +6511,7 @@
       </p:sp>
       <p:sp>
         <p:nvSpPr>
-          <p:cNvPr id="8" name="Rectangle 7"/>
-          <p:cNvSpPr/>
-          <p:nvPr/>
-        </p:nvSpPr>
-        <p:spPr>
-          <a:xfrm>
-            <a:off x="5096865" y="1730959"/>
-            <a:ext cx="1995220" cy="31089"/>
-          </a:xfrm>
-          <a:prstGeom prst="rect">
-            <a:avLst/>
-          </a:prstGeom>
-          <a:solidFill>
-            <a:srgbClr val="14B8A6"/>
-          </a:solidFill>
-          <a:ln>
-            <a:noFill/>
-          </a:ln>
-          <a:effectLst/>
-        </p:spPr>
-        <p:style>
-          <a:lnRef idx="1">
-            <a:schemeClr val="accent1"/>
-          </a:lnRef>
-          <a:fillRef idx="3">
-            <a:schemeClr val="accent1"/>
-          </a:fillRef>
-          <a:effectRef idx="2">
-            <a:schemeClr val="accent1"/>
-          </a:effectRef>
-          <a:fontRef idx="minor">
-            <a:schemeClr val="lt1"/>
-          </a:fontRef>
-        </p:style>
-        <p:txBody>
-          <a:bodyPr rtlCol="0" anchor="ctr"/>
-          <a:lstStyle/>
-          <a:p>
-            <a:pPr algn="ctr"/>
-          </a:p>
-        </p:txBody>
-      </p:sp>
-      <p:sp>
-        <p:nvSpPr>
-          <p:cNvPr id="9" name="Isosceles Triangle 8"/>
-          <p:cNvSpPr/>
-          <p:nvPr/>
-        </p:nvSpPr>
-        <p:spPr>
-          <a:xfrm rot="5400000">
-            <a:off x="6021324" y="1673352"/>
-            <a:ext cx="146304" cy="146304"/>
-          </a:xfrm>
-          <a:prstGeom prst="triangle">
-            <a:avLst/>
-          </a:prstGeom>
-          <a:solidFill>
-            <a:srgbClr val="0D9488"/>
-          </a:solidFill>
-          <a:ln>
-            <a:noFill/>
-          </a:ln>
-          <a:effectLst/>
-        </p:spPr>
-        <p:style>
-          <a:lnRef idx="1">
-            <a:schemeClr val="accent1"/>
-          </a:lnRef>
-          <a:fillRef idx="3">
-            <a:schemeClr val="accent1"/>
-          </a:fillRef>
-          <a:effectRef idx="2">
-            <a:schemeClr val="accent1"/>
-          </a:effectRef>
-          <a:fontRef idx="minor">
-            <a:schemeClr val="lt1"/>
-          </a:fontRef>
-        </p:style>
-        <p:txBody>
-          <a:bodyPr rtlCol="0" anchor="ctr"/>
-          <a:lstStyle/>
-          <a:p>
-            <a:pPr algn="ctr"/>
-          </a:p>
-        </p:txBody>
-      </p:sp>
-      <p:sp>
-        <p:nvSpPr>
-          <p:cNvPr id="10" name="Rectangle 9"/>
-          <p:cNvSpPr/>
-          <p:nvPr/>
-        </p:nvSpPr>
-        <p:spPr>
-          <a:xfrm>
-            <a:off x="7622438" y="1730959"/>
-            <a:ext cx="1995220" cy="31089"/>
-          </a:xfrm>
-          <a:prstGeom prst="rect">
-            <a:avLst/>
-          </a:prstGeom>
-          <a:solidFill>
-            <a:srgbClr val="14B8A6"/>
-          </a:solidFill>
-          <a:ln>
-            <a:noFill/>
-          </a:ln>
-          <a:effectLst/>
-        </p:spPr>
-        <p:style>
-          <a:lnRef idx="1">
-            <a:schemeClr val="accent1"/>
-          </a:lnRef>
-          <a:fillRef idx="3">
-            <a:schemeClr val="accent1"/>
-          </a:fillRef>
-          <a:effectRef idx="2">
-            <a:schemeClr val="accent1"/>
-          </a:effectRef>
-          <a:fontRef idx="minor">
-            <a:schemeClr val="lt1"/>
-          </a:fontRef>
-        </p:style>
-        <p:txBody>
-          <a:bodyPr rtlCol="0" anchor="ctr"/>
-          <a:lstStyle/>
-          <a:p>
-            <a:pPr algn="ctr"/>
-          </a:p>
-        </p:txBody>
-      </p:sp>
-      <p:sp>
-        <p:nvSpPr>
-          <p:cNvPr id="11" name="Isosceles Triangle 10"/>
-          <p:cNvSpPr/>
-          <p:nvPr/>
-        </p:nvSpPr>
-        <p:spPr>
-          <a:xfrm rot="5400000">
-            <a:off x="8546896" y="1673352"/>
-            <a:ext cx="146304" cy="146304"/>
-          </a:xfrm>
-          <a:prstGeom prst="triangle">
-            <a:avLst/>
-          </a:prstGeom>
-          <a:solidFill>
-            <a:srgbClr val="0D9488"/>
-          </a:solidFill>
-          <a:ln>
-            <a:noFill/>
-          </a:ln>
-          <a:effectLst/>
-        </p:spPr>
-        <p:style>
-          <a:lnRef idx="1">
-            <a:schemeClr val="accent1"/>
-          </a:lnRef>
-          <a:fillRef idx="3">
-            <a:schemeClr val="accent1"/>
-          </a:fillRef>
-          <a:effectRef idx="2">
-            <a:schemeClr val="accent1"/>
-          </a:effectRef>
-          <a:fontRef idx="minor">
-            <a:schemeClr val="lt1"/>
-          </a:fontRef>
-        </p:style>
-        <p:txBody>
-          <a:bodyPr rtlCol="0" anchor="ctr"/>
-          <a:lstStyle/>
-          <a:p>
-            <a:pPr algn="ctr"/>
-          </a:p>
-        </p:txBody>
-      </p:sp>
-      <p:sp>
-        <p:nvSpPr>
-          <p:cNvPr id="12" name="Oval 11"/>
-          <p:cNvSpPr/>
-          <p:nvPr/>
-        </p:nvSpPr>
-        <p:spPr>
-          <a:xfrm>
-            <a:off x="2040940" y="1481328"/>
-            <a:ext cx="530352" cy="530352"/>
-          </a:xfrm>
-          <a:prstGeom prst="ellipse">
-            <a:avLst/>
-          </a:prstGeom>
-          <a:solidFill>
-            <a:srgbClr val="0D9488"/>
-          </a:solidFill>
-          <a:ln>
-            <a:noFill/>
-          </a:ln>
-          <a:effectLst/>
-        </p:spPr>
-        <p:style>
-          <a:lnRef idx="1">
-            <a:schemeClr val="accent1"/>
-          </a:lnRef>
-          <a:fillRef idx="3">
-            <a:schemeClr val="accent1"/>
-          </a:fillRef>
-          <a:effectRef idx="2">
-            <a:schemeClr val="accent1"/>
-          </a:effectRef>
-          <a:fontRef idx="minor">
-            <a:schemeClr val="lt1"/>
-          </a:fontRef>
-        </p:style>
-        <p:txBody>
-          <a:bodyPr rtlCol="0" anchor="ctr"/>
-          <a:lstStyle/>
-          <a:p>
-            <a:pPr algn="ctr"/>
-          </a:p>
-        </p:txBody>
-      </p:sp>
-      <p:sp>
-        <p:nvSpPr>
-          <p:cNvPr id="13" name="TextBox 12"/>
+          <p:cNvPr id="10" name="TextBox 9"/>
           <p:cNvSpPr txBox="1"/>
           <p:nvPr/>
         </p:nvSpPr>
@@ -6678,7 +6546,7 @@
       </p:sp>
       <p:sp>
         <p:nvSpPr>
-          <p:cNvPr id="14" name="Rounded Rectangle 13"/>
+          <p:cNvPr id="11" name="Rounded Rectangle 10"/>
           <p:cNvSpPr/>
           <p:nvPr/>
         </p:nvSpPr>
@@ -6726,7 +6594,7 @@
       </p:sp>
       <p:sp>
         <p:nvSpPr>
-          <p:cNvPr id="15" name="TextBox 14"/>
+          <p:cNvPr id="12" name="TextBox 11"/>
           <p:cNvSpPr txBox="1"/>
           <p:nvPr/>
         </p:nvSpPr>
@@ -6761,7 +6629,7 @@
       </p:sp>
       <p:sp>
         <p:nvSpPr>
-          <p:cNvPr id="16" name="TextBox 15"/>
+          <p:cNvPr id="13" name="TextBox 12"/>
           <p:cNvSpPr txBox="1"/>
           <p:nvPr/>
         </p:nvSpPr>
@@ -6800,7 +6668,7 @@
       </p:sp>
       <p:sp>
         <p:nvSpPr>
-          <p:cNvPr id="17" name="Oval 16"/>
+          <p:cNvPr id="14" name="Oval 13"/>
           <p:cNvSpPr/>
           <p:nvPr/>
         </p:nvSpPr>
@@ -6844,7 +6712,7 @@
       </p:sp>
       <p:sp>
         <p:nvSpPr>
-          <p:cNvPr id="18" name="TextBox 17"/>
+          <p:cNvPr id="15" name="TextBox 14"/>
           <p:cNvSpPr txBox="1"/>
           <p:nvPr/>
         </p:nvSpPr>
@@ -6879,7 +6747,7 @@
       </p:sp>
       <p:sp>
         <p:nvSpPr>
-          <p:cNvPr id="19" name="Rounded Rectangle 18"/>
+          <p:cNvPr id="16" name="Rounded Rectangle 15"/>
           <p:cNvSpPr/>
           <p:nvPr/>
         </p:nvSpPr>
@@ -6927,7 +6795,7 @@
       </p:sp>
       <p:sp>
         <p:nvSpPr>
-          <p:cNvPr id="20" name="TextBox 19"/>
+          <p:cNvPr id="17" name="TextBox 16"/>
           <p:cNvSpPr txBox="1"/>
           <p:nvPr/>
         </p:nvSpPr>
@@ -6962,7 +6830,7 @@
       </p:sp>
       <p:sp>
         <p:nvSpPr>
-          <p:cNvPr id="21" name="TextBox 20"/>
+          <p:cNvPr id="18" name="TextBox 17"/>
           <p:cNvSpPr txBox="1"/>
           <p:nvPr/>
         </p:nvSpPr>
@@ -7001,7 +6869,7 @@
       </p:sp>
       <p:sp>
         <p:nvSpPr>
-          <p:cNvPr id="22" name="Oval 21"/>
+          <p:cNvPr id="19" name="Oval 18"/>
           <p:cNvSpPr/>
           <p:nvPr/>
         </p:nvSpPr>
@@ -7045,7 +6913,7 @@
       </p:sp>
       <p:sp>
         <p:nvSpPr>
-          <p:cNvPr id="23" name="TextBox 22"/>
+          <p:cNvPr id="20" name="TextBox 19"/>
           <p:cNvSpPr txBox="1"/>
           <p:nvPr/>
         </p:nvSpPr>
@@ -7080,7 +6948,7 @@
       </p:sp>
       <p:sp>
         <p:nvSpPr>
-          <p:cNvPr id="24" name="Rounded Rectangle 23"/>
+          <p:cNvPr id="21" name="Rounded Rectangle 20"/>
           <p:cNvSpPr/>
           <p:nvPr/>
         </p:nvSpPr>
@@ -7128,7 +6996,7 @@
       </p:sp>
       <p:sp>
         <p:nvSpPr>
-          <p:cNvPr id="25" name="TextBox 24"/>
+          <p:cNvPr id="22" name="TextBox 21"/>
           <p:cNvSpPr txBox="1"/>
           <p:nvPr/>
         </p:nvSpPr>
@@ -7163,7 +7031,7 @@
       </p:sp>
       <p:sp>
         <p:nvSpPr>
-          <p:cNvPr id="26" name="TextBox 25"/>
+          <p:cNvPr id="23" name="TextBox 22"/>
           <p:cNvSpPr txBox="1"/>
           <p:nvPr/>
         </p:nvSpPr>
@@ -7202,7 +7070,7 @@
       </p:sp>
       <p:sp>
         <p:nvSpPr>
-          <p:cNvPr id="27" name="Oval 26"/>
+          <p:cNvPr id="24" name="Oval 23"/>
           <p:cNvSpPr/>
           <p:nvPr/>
         </p:nvSpPr>
@@ -7246,7 +7114,7 @@
       </p:sp>
       <p:sp>
         <p:nvSpPr>
-          <p:cNvPr id="28" name="TextBox 27"/>
+          <p:cNvPr id="25" name="TextBox 24"/>
           <p:cNvSpPr txBox="1"/>
           <p:nvPr/>
         </p:nvSpPr>
@@ -7281,7 +7149,7 @@
       </p:sp>
       <p:sp>
         <p:nvSpPr>
-          <p:cNvPr id="29" name="Rounded Rectangle 28"/>
+          <p:cNvPr id="26" name="Rounded Rectangle 25"/>
           <p:cNvSpPr/>
           <p:nvPr/>
         </p:nvSpPr>
@@ -7329,7 +7197,7 @@
       </p:sp>
       <p:sp>
         <p:nvSpPr>
-          <p:cNvPr id="30" name="TextBox 29"/>
+          <p:cNvPr id="27" name="TextBox 26"/>
           <p:cNvSpPr txBox="1"/>
           <p:nvPr/>
         </p:nvSpPr>
@@ -7364,7 +7232,7 @@
       </p:sp>
       <p:sp>
         <p:nvSpPr>
-          <p:cNvPr id="31" name="TextBox 30"/>
+          <p:cNvPr id="28" name="TextBox 27"/>
           <p:cNvSpPr txBox="1"/>
           <p:nvPr/>
         </p:nvSpPr>
@@ -7403,7 +7271,7 @@
       </p:sp>
       <p:sp>
         <p:nvSpPr>
-          <p:cNvPr id="32" name="TextBox 31"/>
+          <p:cNvPr id="29" name="TextBox 28"/>
           <p:cNvSpPr txBox="1"/>
           <p:nvPr/>
         </p:nvSpPr>
@@ -7438,7 +7306,7 @@
       </p:sp>
       <p:sp>
         <p:nvSpPr>
-          <p:cNvPr id="33" name="TextBox 32"/>
+          <p:cNvPr id="30" name="TextBox 29"/>
           <p:cNvSpPr txBox="1"/>
           <p:nvPr/>
         </p:nvSpPr>
@@ -7473,7 +7341,7 @@
       </p:sp>
       <p:sp>
         <p:nvSpPr>
-          <p:cNvPr id="34" name="Rectangle 33"/>
+          <p:cNvPr id="31" name="Rectangle 30"/>
           <p:cNvSpPr/>
           <p:nvPr/>
         </p:nvSpPr>
@@ -7997,7 +7865,7 @@
           <a:p>
             <a:pPr>
               <a:lnSpc>
-                <a:spcPct val="115000"/>
+                <a:spcPct val="149500"/>
               </a:lnSpc>
             </a:pPr>
             <a:r>
@@ -8022,7 +7890,7 @@
           <a:p>
             <a:pPr>
               <a:lnSpc>
-                <a:spcPct val="115000"/>
+                <a:spcPct val="149500"/>
               </a:lnSpc>
             </a:pPr>
             <a:r>
@@ -8047,7 +7915,7 @@
           <a:p>
             <a:pPr>
               <a:lnSpc>
-                <a:spcPct val="115000"/>
+                <a:spcPct val="149500"/>
               </a:lnSpc>
             </a:pPr>
             <a:r>
@@ -8552,7 +8420,7 @@
           <a:p>
             <a:pPr>
               <a:lnSpc>
-                <a:spcPct val="115000"/>
+                <a:spcPct val="149500"/>
               </a:lnSpc>
             </a:pPr>
             <a:r>
@@ -8577,7 +8445,7 @@
           <a:p>
             <a:pPr>
               <a:lnSpc>
-                <a:spcPct val="115000"/>
+                <a:spcPct val="149500"/>
               </a:lnSpc>
             </a:pPr>
             <a:r>
@@ -8602,7 +8470,7 @@
           <a:p>
             <a:pPr>
               <a:lnSpc>
-                <a:spcPct val="115000"/>
+                <a:spcPct val="149500"/>
               </a:lnSpc>
             </a:pPr>
             <a:r>
@@ -9222,7 +9090,7 @@
           <a:p>
             <a:pPr>
               <a:lnSpc>
-                <a:spcPct val="115000"/>
+                <a:spcPct val="149500"/>
               </a:lnSpc>
             </a:pPr>
             <a:r>
@@ -9247,7 +9115,7 @@
           <a:p>
             <a:pPr>
               <a:lnSpc>
-                <a:spcPct val="115000"/>
+                <a:spcPct val="149500"/>
               </a:lnSpc>
             </a:pPr>
             <a:r>
@@ -9272,7 +9140,7 @@
           <a:p>
             <a:pPr>
               <a:lnSpc>
-                <a:spcPct val="115000"/>
+                <a:spcPct val="149500"/>
               </a:lnSpc>
             </a:pPr>
             <a:r>
@@ -9777,7 +9645,7 @@
           <a:p>
             <a:pPr>
               <a:lnSpc>
-                <a:spcPct val="115000"/>
+                <a:spcPct val="149500"/>
               </a:lnSpc>
             </a:pPr>
             <a:r>
@@ -9802,7 +9670,7 @@
           <a:p>
             <a:pPr>
               <a:lnSpc>
-                <a:spcPct val="115000"/>
+                <a:spcPct val="149500"/>
               </a:lnSpc>
             </a:pPr>
             <a:r>
@@ -9827,7 +9695,7 @@
           <a:p>
             <a:pPr>
               <a:lnSpc>
-                <a:spcPct val="115000"/>
+                <a:spcPct val="149500"/>
               </a:lnSpc>
             </a:pPr>
             <a:r>

--- a/class/cloud_infra_mgmt/06주차_Kubernetes핵심2/01_강의자료/1차시_ConfigMap과Secret.pptx
+++ b/class/cloud_infra_mgmt/06주차_Kubernetes핵심2/01_강의자료/1차시_ConfigMap과Secret.pptx
@@ -4716,6 +4716,8 @@
                   <a:srgbClr val="14B8A6"/>
                 </a:solidFill>
                 <a:latin typeface="맑은 고딕"/>
+                <a:ea typeface="맑은 고딕"/>
+                <a:cs typeface="맑은 고딕"/>
               </a:rPr>
               <a:t>클라우드인프라관리  ·  6주차 1차시</a:t>
             </a:r>
@@ -4751,6 +4753,8 @@
                   <a:srgbClr val="FFFFFF"/>
                 </a:solidFill>
                 <a:latin typeface="맑은 고딕"/>
+                <a:ea typeface="맑은 고딕"/>
+                <a:cs typeface="맑은 고딕"/>
               </a:rPr>
               <a:t>ConfigMap과 Secret</a:t>
             </a:r>
@@ -4786,6 +4790,8 @@
                   <a:srgbClr val="C9D3E6"/>
                 </a:solidFill>
                 <a:latin typeface="맑은 고딕"/>
+                <a:ea typeface="맑은 고딕"/>
+                <a:cs typeface="맑은 고딕"/>
               </a:rPr>
               <a:t>설정값과 비밀정보를 코드에서 분리하기</a:t>
             </a:r>
@@ -4821,6 +4827,8 @@
                   <a:srgbClr val="FFFFFF"/>
                 </a:solidFill>
                 <a:latin typeface="맑은 고딕"/>
+                <a:ea typeface="맑은 고딕"/>
+                <a:cs typeface="맑은 고딕"/>
               </a:rPr>
               <a:t>영남이공대학교 김지윤교수</a:t>
             </a:r>
@@ -4980,6 +4988,8 @@
                   <a:srgbClr val="14213D"/>
                 </a:solidFill>
                 <a:latin typeface="맑은 고딕"/>
+                <a:ea typeface="맑은 고딕"/>
+                <a:cs typeface="맑은 고딕"/>
               </a:rPr>
               <a:t>03</a:t>
             </a:r>
@@ -5015,6 +5025,8 @@
                   <a:srgbClr val="14B8A6"/>
                 </a:solidFill>
                 <a:latin typeface="맑은 고딕"/>
+                <a:ea typeface="맑은 고딕"/>
+                <a:cs typeface="맑은 고딕"/>
               </a:rPr>
               <a:t>실습 안내</a:t>
             </a:r>
@@ -5050,6 +5062,8 @@
                   <a:srgbClr val="FFFFFF"/>
                 </a:solidFill>
                 <a:latin typeface="맑은 고딕"/>
+                <a:ea typeface="맑은 고딕"/>
+                <a:cs typeface="맑은 고딕"/>
               </a:rPr>
               <a:t>VM 안내</a:t>
             </a:r>
@@ -5089,6 +5103,8 @@
                   <a:srgbClr val="0D9488"/>
                 </a:solidFill>
                 <a:latin typeface="맑은 고딕"/>
+                <a:ea typeface="맑은 고딕"/>
+                <a:cs typeface="맑은 고딕"/>
               </a:rPr>
               <a:t>●  </a:t>
             </a:r>
@@ -5098,6 +5114,8 @@
                   <a:srgbClr val="222733"/>
                 </a:solidFill>
                 <a:latin typeface="맑은 고딕"/>
+                <a:ea typeface="맑은 고딕"/>
+                <a:cs typeface="맑은 고딕"/>
               </a:rPr>
               <a:t>개인 VM에서 kubectl create configmap 으로 간단한 설정값 하나 생성</a:t>
             </a:r>
@@ -5114,6 +5132,8 @@
                   <a:srgbClr val="0D9488"/>
                 </a:solidFill>
                 <a:latin typeface="맑은 고딕"/>
+                <a:ea typeface="맑은 고딕"/>
+                <a:cs typeface="맑은 고딕"/>
               </a:rPr>
               <a:t>●  </a:t>
             </a:r>
@@ -5123,6 +5143,8 @@
                   <a:srgbClr val="222733"/>
                 </a:solidFill>
                 <a:latin typeface="맑은 고딕"/>
+                <a:ea typeface="맑은 고딕"/>
+                <a:cs typeface="맑은 고딕"/>
               </a:rPr>
               <a:t>kubectl create secret generic 으로 비밀값 하나 생성</a:t>
             </a:r>
@@ -5139,6 +5161,8 @@
                   <a:srgbClr val="0D9488"/>
                 </a:solidFill>
                 <a:latin typeface="맑은 고딕"/>
+                <a:ea typeface="맑은 고딕"/>
+                <a:cs typeface="맑은 고딕"/>
               </a:rPr>
               <a:t>●  </a:t>
             </a:r>
@@ -5148,6 +5172,8 @@
                   <a:srgbClr val="222733"/>
                 </a:solidFill>
                 <a:latin typeface="맑은 고딕"/>
+                <a:ea typeface="맑은 고딕"/>
+                <a:cs typeface="맑은 고딕"/>
               </a:rPr>
               <a:t>kubectl get configmap / kubectl get secret 으로 확인 후 캡처</a:t>
             </a:r>
@@ -5183,6 +5209,8 @@
                   <a:srgbClr val="5B6373"/>
                 </a:solidFill>
                 <a:latin typeface="맑은 고딕"/>
+                <a:ea typeface="맑은 고딕"/>
+                <a:cs typeface="맑은 고딕"/>
               </a:rPr>
               <a:t>클라우드인프라관리  ·  6주차 1차시</a:t>
             </a:r>
@@ -5218,6 +5246,8 @@
                   <a:srgbClr val="5B6373"/>
                 </a:solidFill>
                 <a:latin typeface="맑은 고딕"/>
+                <a:ea typeface="맑은 고딕"/>
+                <a:cs typeface="맑은 고딕"/>
               </a:rPr>
               <a:t>10 / 12</a:t>
             </a:r>
@@ -5403,6 +5433,8 @@
                   <a:srgbClr val="FFFFFF"/>
                 </a:solidFill>
                 <a:latin typeface="맑은 고딕"/>
+                <a:ea typeface="맑은 고딕"/>
+                <a:cs typeface="맑은 고딕"/>
               </a:rPr>
               <a:t>오늘의 정리</a:t>
             </a:r>
@@ -5456,6 +5488,8 @@
                   <a:srgbClr val="14213D"/>
                 </a:solidFill>
                 <a:latin typeface="맑은 고딕"/>
+                <a:ea typeface="맑은 고딕"/>
+                <a:cs typeface="맑은 고딕"/>
               </a:rPr>
               <a:t>1</a:t>
             </a:r>
@@ -5491,6 +5525,8 @@
                   <a:srgbClr val="FFFFFF"/>
                 </a:solidFill>
                 <a:latin typeface="맑은 고딕"/>
+                <a:ea typeface="맑은 고딕"/>
+                <a:cs typeface="맑은 고딕"/>
               </a:rPr>
               <a:t>ConfigMap = 일반 설정값을 코드에서 분리해 관리</a:t>
             </a:r>
@@ -5544,6 +5580,8 @@
                   <a:srgbClr val="14213D"/>
                 </a:solidFill>
                 <a:latin typeface="맑은 고딕"/>
+                <a:ea typeface="맑은 고딕"/>
+                <a:cs typeface="맑은 고딕"/>
               </a:rPr>
               <a:t>2</a:t>
             </a:r>
@@ -5579,6 +5617,8 @@
                   <a:srgbClr val="FFFFFF"/>
                 </a:solidFill>
                 <a:latin typeface="맑은 고딕"/>
+                <a:ea typeface="맑은 고딕"/>
+                <a:cs typeface="맑은 고딕"/>
               </a:rPr>
               <a:t>Secret = 비밀번호 같은 민감 정보를 조금 더 엄격하게 관리</a:t>
             </a:r>
@@ -5720,6 +5760,8 @@
                   <a:srgbClr val="FFFFFF"/>
                 </a:solidFill>
                 <a:latin typeface="맑은 고딕"/>
+                <a:ea typeface="맑은 고딕"/>
+                <a:cs typeface="맑은 고딕"/>
               </a:rPr>
               <a:t>다음 차시 예고</a:t>
             </a:r>
@@ -5755,6 +5797,8 @@
                   <a:srgbClr val="14B8A6"/>
                 </a:solidFill>
                 <a:latin typeface="맑은 고딕"/>
+                <a:ea typeface="맑은 고딕"/>
+                <a:cs typeface="맑은 고딕"/>
               </a:rPr>
               <a:t>다음 차시 예고 — 6주차 2차시</a:t>
             </a:r>
@@ -5790,6 +5834,8 @@
                   <a:srgbClr val="FFFFFF"/>
                 </a:solidFill>
                 <a:latin typeface="맑은 고딕"/>
+                <a:ea typeface="맑은 고딕"/>
+                <a:cs typeface="맑은 고딕"/>
               </a:rPr>
               <a:t>설정은 분리했지만, 아직 데이터를 영구적으로 저장하는 방법은 못 배웠습니다. PV/PVC로 K8s에서 데이터를 안전하게 저장하는 법을 배웁니다.</a:t>
             </a:r>
@@ -5931,6 +5977,8 @@
                   <a:srgbClr val="14B8A6"/>
                 </a:solidFill>
                 <a:latin typeface="맑은 고딕"/>
+                <a:ea typeface="맑은 고딕"/>
+                <a:cs typeface="맑은 고딕"/>
               </a:rPr>
               <a:t>SESSION OVERVIEW</a:t>
             </a:r>
@@ -5966,6 +6014,8 @@
                   <a:srgbClr val="FFFFFF"/>
                 </a:solidFill>
                 <a:latin typeface="맑은 고딕"/>
+                <a:ea typeface="맑은 고딕"/>
+                <a:cs typeface="맑은 고딕"/>
               </a:rPr>
               <a:t>오늘의 학습 목표</a:t>
             </a:r>
@@ -6005,6 +6055,8 @@
                   <a:srgbClr val="222733"/>
                 </a:solidFill>
                 <a:latin typeface="맑은 고딕"/>
+                <a:ea typeface="맑은 고딕"/>
+                <a:cs typeface="맑은 고딕"/>
               </a:rPr>
               <a:t>1.  설정값을 코드에서 분리해야 하는 이유를 이해한다</a:t>
             </a:r>
@@ -6021,6 +6073,8 @@
                   <a:srgbClr val="222733"/>
                 </a:solidFill>
                 <a:latin typeface="맑은 고딕"/>
+                <a:ea typeface="맑은 고딕"/>
+                <a:cs typeface="맑은 고딕"/>
               </a:rPr>
               <a:t>2.  ConfigMap으로 일반 설정값을 관리한다</a:t>
             </a:r>
@@ -6037,6 +6091,8 @@
                   <a:srgbClr val="222733"/>
                 </a:solidFill>
                 <a:latin typeface="맑은 고딕"/>
+                <a:ea typeface="맑은 고딕"/>
+                <a:cs typeface="맑은 고딕"/>
               </a:rPr>
               <a:t>3.  Secret으로 비밀번호 같은 민감 정보를 관리한다</a:t>
             </a:r>
@@ -6072,6 +6128,8 @@
                   <a:srgbClr val="5B6373"/>
                 </a:solidFill>
                 <a:latin typeface="맑은 고딕"/>
+                <a:ea typeface="맑은 고딕"/>
+                <a:cs typeface="맑은 고딕"/>
               </a:rPr>
               <a:t>클라우드인프라관리  ·  6주차 1차시</a:t>
             </a:r>
@@ -6107,6 +6165,8 @@
                   <a:srgbClr val="5B6373"/>
                 </a:solidFill>
                 <a:latin typeface="맑은 고딕"/>
+                <a:ea typeface="맑은 고딕"/>
+                <a:cs typeface="맑은 고딕"/>
               </a:rPr>
               <a:t>02 / 12</a:t>
             </a:r>
@@ -6292,6 +6352,8 @@
                   <a:srgbClr val="14B8A6"/>
                 </a:solidFill>
                 <a:latin typeface="맑은 고딕"/>
+                <a:ea typeface="맑은 고딕"/>
+                <a:cs typeface="맑은 고딕"/>
               </a:rPr>
               <a:t>SESSION OVERVIEW</a:t>
             </a:r>
@@ -6327,6 +6389,8 @@
                   <a:srgbClr val="FFFFFF"/>
                 </a:solidFill>
                 <a:latin typeface="맑은 고딕"/>
+                <a:ea typeface="맑은 고딕"/>
+                <a:cs typeface="맑은 고딕"/>
               </a:rPr>
               <a:t>오늘의 진행 순서</a:t>
             </a:r>
@@ -6538,6 +6602,8 @@
                   <a:srgbClr val="FFFFFF"/>
                 </a:solidFill>
                 <a:latin typeface="맑은 고딕"/>
+                <a:ea typeface="맑은 고딕"/>
+                <a:cs typeface="맑은 고딕"/>
               </a:rPr>
               <a:t>1</a:t>
             </a:r>
@@ -6621,6 +6687,8 @@
                   <a:srgbClr val="14213D"/>
                 </a:solidFill>
                 <a:latin typeface="맑은 고딕"/>
+                <a:ea typeface="맑은 고딕"/>
+                <a:cs typeface="맑은 고딕"/>
               </a:rPr>
               <a:t>개념 설명</a:t>
             </a:r>
@@ -6660,6 +6728,8 @@
                   <a:srgbClr val="222733"/>
                 </a:solidFill>
                 <a:latin typeface="맑은 고딕"/>
+                <a:ea typeface="맑은 고딕"/>
+                <a:cs typeface="맑은 고딕"/>
               </a:rPr>
               <a:t>강의자료 기반 직접 강의</a:t>
             </a:r>
@@ -6739,6 +6809,8 @@
                   <a:srgbClr val="FFFFFF"/>
                 </a:solidFill>
                 <a:latin typeface="맑은 고딕"/>
+                <a:ea typeface="맑은 고딕"/>
+                <a:cs typeface="맑은 고딕"/>
               </a:rPr>
               <a:t>2</a:t>
             </a:r>
@@ -6822,6 +6894,8 @@
                   <a:srgbClr val="14213D"/>
                 </a:solidFill>
                 <a:latin typeface="맑은 고딕"/>
+                <a:ea typeface="맑은 고딕"/>
+                <a:cs typeface="맑은 고딕"/>
               </a:rPr>
               <a:t>Killercoda</a:t>
             </a:r>
@@ -6861,6 +6935,8 @@
                   <a:srgbClr val="222733"/>
                 </a:solidFill>
                 <a:latin typeface="맑은 고딕"/>
+                <a:ea typeface="맑은 고딕"/>
+                <a:cs typeface="맑은 고딕"/>
               </a:rPr>
               <a:t>Secret 환경변수 실습</a:t>
             </a:r>
@@ -6940,6 +7016,8 @@
                   <a:srgbClr val="FFFFFF"/>
                 </a:solidFill>
                 <a:latin typeface="맑은 고딕"/>
+                <a:ea typeface="맑은 고딕"/>
+                <a:cs typeface="맑은 고딕"/>
               </a:rPr>
               <a:t>3</a:t>
             </a:r>
@@ -7023,6 +7101,8 @@
                   <a:srgbClr val="14213D"/>
                 </a:solidFill>
                 <a:latin typeface="맑은 고딕"/>
+                <a:ea typeface="맑은 고딕"/>
+                <a:cs typeface="맑은 고딕"/>
               </a:rPr>
               <a:t>VM 안내</a:t>
             </a:r>
@@ -7062,6 +7142,8 @@
                   <a:srgbClr val="222733"/>
                 </a:solidFill>
                 <a:latin typeface="맑은 고딕"/>
+                <a:ea typeface="맑은 고딕"/>
+                <a:cs typeface="맑은 고딕"/>
               </a:rPr>
               <a:t>VM에서 동일 실습</a:t>
             </a:r>
@@ -7141,6 +7223,8 @@
                   <a:srgbClr val="FFFFFF"/>
                 </a:solidFill>
                 <a:latin typeface="맑은 고딕"/>
+                <a:ea typeface="맑은 고딕"/>
+                <a:cs typeface="맑은 고딕"/>
               </a:rPr>
               <a:t>4</a:t>
             </a:r>
@@ -7224,6 +7308,8 @@
                   <a:srgbClr val="14213D"/>
                 </a:solidFill>
                 <a:latin typeface="맑은 고딕"/>
+                <a:ea typeface="맑은 고딕"/>
+                <a:cs typeface="맑은 고딕"/>
               </a:rPr>
               <a:t>결과 제출</a:t>
             </a:r>
@@ -7263,6 +7349,8 @@
                   <a:srgbClr val="222733"/>
                 </a:solidFill>
                 <a:latin typeface="맑은 고딕"/>
+                <a:ea typeface="맑은 고딕"/>
+                <a:cs typeface="맑은 고딕"/>
               </a:rPr>
               <a:t>체크리스트 제출</a:t>
             </a:r>
@@ -7298,6 +7386,8 @@
                   <a:srgbClr val="5B6373"/>
                 </a:solidFill>
                 <a:latin typeface="맑은 고딕"/>
+                <a:ea typeface="맑은 고딕"/>
+                <a:cs typeface="맑은 고딕"/>
               </a:rPr>
               <a:t>클라우드인프라관리  ·  6주차 1차시</a:t>
             </a:r>
@@ -7333,6 +7423,8 @@
                   <a:srgbClr val="5B6373"/>
                 </a:solidFill>
                 <a:latin typeface="맑은 고딕"/>
+                <a:ea typeface="맑은 고딕"/>
+                <a:cs typeface="맑은 고딕"/>
               </a:rPr>
               <a:t>03 / 12</a:t>
             </a:r>
@@ -7536,6 +7628,8 @@
                   <a:srgbClr val="14213D"/>
                 </a:solidFill>
                 <a:latin typeface="맑은 고딕"/>
+                <a:ea typeface="맑은 고딕"/>
+                <a:cs typeface="맑은 고딕"/>
               </a:rPr>
               <a:t>PART 01</a:t>
             </a:r>
@@ -7571,6 +7665,8 @@
                   <a:srgbClr val="FFFFFF"/>
                 </a:solidFill>
                 <a:latin typeface="맑은 고딕"/>
+                <a:ea typeface="맑은 고딕"/>
+                <a:cs typeface="맑은 고딕"/>
               </a:rPr>
               <a:t>설정을 코드에서 분리하기</a:t>
             </a:r>
@@ -7606,6 +7702,8 @@
                   <a:srgbClr val="C9D3E6"/>
                 </a:solidFill>
                 <a:latin typeface="맑은 고딕"/>
+                <a:ea typeface="맑은 고딕"/>
+                <a:cs typeface="맑은 고딕"/>
               </a:rPr>
               <a:t>ConfigMap</a:t>
             </a:r>
@@ -7765,6 +7863,8 @@
                   <a:srgbClr val="14213D"/>
                 </a:solidFill>
                 <a:latin typeface="맑은 고딕"/>
+                <a:ea typeface="맑은 고딕"/>
+                <a:cs typeface="맑은 고딕"/>
               </a:rPr>
               <a:t>01</a:t>
             </a:r>
@@ -7800,6 +7900,8 @@
                   <a:srgbClr val="14B8A6"/>
                 </a:solidFill>
                 <a:latin typeface="맑은 고딕"/>
+                <a:ea typeface="맑은 고딕"/>
+                <a:cs typeface="맑은 고딕"/>
               </a:rPr>
               <a:t>PART 1 · 설정 분리</a:t>
             </a:r>
@@ -7835,6 +7937,8 @@
                   <a:srgbClr val="FFFFFF"/>
                 </a:solidFill>
                 <a:latin typeface="맑은 고딕"/>
+                <a:ea typeface="맑은 고딕"/>
+                <a:cs typeface="맑은 고딕"/>
               </a:rPr>
               <a:t>왜 설정값을 코드에 박아두면 안 될까</a:t>
             </a:r>
@@ -7874,6 +7978,8 @@
                   <a:srgbClr val="0D9488"/>
                 </a:solidFill>
                 <a:latin typeface="맑은 고딕"/>
+                <a:ea typeface="맑은 고딕"/>
+                <a:cs typeface="맑은 고딕"/>
               </a:rPr>
               <a:t>●  </a:t>
             </a:r>
@@ -7883,6 +7989,8 @@
                   <a:srgbClr val="222733"/>
                 </a:solidFill>
                 <a:latin typeface="맑은 고딕"/>
+                <a:ea typeface="맑은 고딕"/>
+                <a:cs typeface="맑은 고딕"/>
               </a:rPr>
               <a:t>이미지 안에 설정값을 하드코딩하면, 값 하나 바꿀 때마다 이미지를 다시 빌드해야 함</a:t>
             </a:r>
@@ -7899,6 +8007,8 @@
                   <a:srgbClr val="0D9488"/>
                 </a:solidFill>
                 <a:latin typeface="맑은 고딕"/>
+                <a:ea typeface="맑은 고딕"/>
+                <a:cs typeface="맑은 고딕"/>
               </a:rPr>
               <a:t>●  </a:t>
             </a:r>
@@ -7908,6 +8018,8 @@
                   <a:srgbClr val="222733"/>
                 </a:solidFill>
                 <a:latin typeface="맑은 고딕"/>
+                <a:ea typeface="맑은 고딕"/>
+                <a:cs typeface="맑은 고딕"/>
               </a:rPr>
               <a:t>같은 이미지를 개발·운영 환경에서 다른 설정으로 쓰고 싶을 때도 곤란함</a:t>
             </a:r>
@@ -7924,6 +8036,8 @@
                   <a:srgbClr val="0D9488"/>
                 </a:solidFill>
                 <a:latin typeface="맑은 고딕"/>
+                <a:ea typeface="맑은 고딕"/>
+                <a:cs typeface="맑은 고딕"/>
               </a:rPr>
               <a:t>●  </a:t>
             </a:r>
@@ -7933,6 +8047,8 @@
                   <a:srgbClr val="222733"/>
                 </a:solidFill>
                 <a:latin typeface="맑은 고딕"/>
+                <a:ea typeface="맑은 고딕"/>
+                <a:cs typeface="맑은 고딕"/>
               </a:rPr>
               <a:t>ConfigMap = 이런 '설정값'을 이미지 밖에 따로 저장해두는 K8s 오브젝트</a:t>
             </a:r>
@@ -8012,6 +8128,8 @@
                   <a:srgbClr val="FFFFFF"/>
                 </a:solidFill>
                 <a:latin typeface="맑은 고딕"/>
+                <a:ea typeface="맑은 고딕"/>
+                <a:cs typeface="맑은 고딕"/>
               </a:rPr>
               <a:t>💡  핵심 아이디어</a:t>
             </a:r>
@@ -8047,6 +8165,8 @@
                   <a:srgbClr val="FFFFFF"/>
                 </a:solidFill>
                 <a:latin typeface="맑은 고딕"/>
+                <a:ea typeface="맑은 고딕"/>
+                <a:cs typeface="맑은 고딕"/>
               </a:rPr>
               <a:t>이미지(코드)는 그대로 두고, ConfigMap만 바꿔서 다른 환경에 재사용한다</a:t>
             </a:r>
@@ -8082,6 +8202,8 @@
                   <a:srgbClr val="5B6373"/>
                 </a:solidFill>
                 <a:latin typeface="맑은 고딕"/>
+                <a:ea typeface="맑은 고딕"/>
+                <a:cs typeface="맑은 고딕"/>
               </a:rPr>
               <a:t>클라우드인프라관리  ·  6주차 1차시</a:t>
             </a:r>
@@ -8117,6 +8239,8 @@
                   <a:srgbClr val="5B6373"/>
                 </a:solidFill>
                 <a:latin typeface="맑은 고딕"/>
+                <a:ea typeface="맑은 고딕"/>
+                <a:cs typeface="맑은 고딕"/>
               </a:rPr>
               <a:t>05 / 12</a:t>
             </a:r>
@@ -8320,6 +8444,8 @@
                   <a:srgbClr val="14213D"/>
                 </a:solidFill>
                 <a:latin typeface="맑은 고딕"/>
+                <a:ea typeface="맑은 고딕"/>
+                <a:cs typeface="맑은 고딕"/>
               </a:rPr>
               <a:t>01</a:t>
             </a:r>
@@ -8355,6 +8481,8 @@
                   <a:srgbClr val="14B8A6"/>
                 </a:solidFill>
                 <a:latin typeface="맑은 고딕"/>
+                <a:ea typeface="맑은 고딕"/>
+                <a:cs typeface="맑은 고딕"/>
               </a:rPr>
               <a:t>PART 1 · 설정 분리</a:t>
             </a:r>
@@ -8390,6 +8518,8 @@
                   <a:srgbClr val="FFFFFF"/>
                 </a:solidFill>
                 <a:latin typeface="맑은 고딕"/>
+                <a:ea typeface="맑은 고딕"/>
+                <a:cs typeface="맑은 고딕"/>
               </a:rPr>
               <a:t>ConfigMap 사용법</a:t>
             </a:r>
@@ -8429,6 +8559,8 @@
                   <a:srgbClr val="0D9488"/>
                 </a:solidFill>
                 <a:latin typeface="맑은 고딕"/>
+                <a:ea typeface="맑은 고딕"/>
+                <a:cs typeface="맑은 고딕"/>
               </a:rPr>
               <a:t>●  </a:t>
             </a:r>
@@ -8438,6 +8570,8 @@
                   <a:srgbClr val="222733"/>
                 </a:solidFill>
                 <a:latin typeface="맑은 고딕"/>
+                <a:ea typeface="맑은 고딕"/>
+                <a:cs typeface="맑은 고딕"/>
               </a:rPr>
               <a:t>kubectl create configmap {이름} --from-literal=KEY=VALUE</a:t>
             </a:r>
@@ -8454,6 +8588,8 @@
                   <a:srgbClr val="0D9488"/>
                 </a:solidFill>
                 <a:latin typeface="맑은 고딕"/>
+                <a:ea typeface="맑은 고딕"/>
+                <a:cs typeface="맑은 고딕"/>
               </a:rPr>
               <a:t>●  </a:t>
             </a:r>
@@ -8463,6 +8599,8 @@
                   <a:srgbClr val="222733"/>
                 </a:solidFill>
                 <a:latin typeface="맑은 고딕"/>
+                <a:ea typeface="맑은 고딕"/>
+                <a:cs typeface="맑은 고딕"/>
               </a:rPr>
               <a:t>Pod의 env(환경변수)로 ConfigMap 값을 불러와서 사용</a:t>
             </a:r>
@@ -8479,6 +8617,8 @@
                   <a:srgbClr val="0D9488"/>
                 </a:solidFill>
                 <a:latin typeface="맑은 고딕"/>
+                <a:ea typeface="맑은 고딕"/>
+                <a:cs typeface="맑은 고딕"/>
               </a:rPr>
               <a:t>●  </a:t>
             </a:r>
@@ -8488,6 +8628,8 @@
                   <a:srgbClr val="222733"/>
                 </a:solidFill>
                 <a:latin typeface="맑은 고딕"/>
+                <a:ea typeface="맑은 고딕"/>
+                <a:cs typeface="맑은 고딕"/>
               </a:rPr>
               <a:t>예: 로그 레벨, API 주소, 최대 연결 수 같은 '민감하지 않은' 설정</a:t>
             </a:r>
@@ -8523,6 +8665,8 @@
                   <a:srgbClr val="5B6373"/>
                 </a:solidFill>
                 <a:latin typeface="맑은 고딕"/>
+                <a:ea typeface="맑은 고딕"/>
+                <a:cs typeface="맑은 고딕"/>
               </a:rPr>
               <a:t>클라우드인프라관리  ·  6주차 1차시</a:t>
             </a:r>
@@ -8558,6 +8702,8 @@
                   <a:srgbClr val="5B6373"/>
                 </a:solidFill>
                 <a:latin typeface="맑은 고딕"/>
+                <a:ea typeface="맑은 고딕"/>
+                <a:cs typeface="맑은 고딕"/>
               </a:rPr>
               <a:t>06 / 12</a:t>
             </a:r>
@@ -8761,6 +8907,8 @@
                   <a:srgbClr val="14213D"/>
                 </a:solidFill>
                 <a:latin typeface="맑은 고딕"/>
+                <a:ea typeface="맑은 고딕"/>
+                <a:cs typeface="맑은 고딕"/>
               </a:rPr>
               <a:t>PART 02</a:t>
             </a:r>
@@ -8796,6 +8944,8 @@
                   <a:srgbClr val="FFFFFF"/>
                 </a:solidFill>
                 <a:latin typeface="맑은 고딕"/>
+                <a:ea typeface="맑은 고딕"/>
+                <a:cs typeface="맑은 고딕"/>
               </a:rPr>
               <a:t>Secret</a:t>
             </a:r>
@@ -8831,6 +8981,8 @@
                   <a:srgbClr val="C9D3E6"/>
                 </a:solidFill>
                 <a:latin typeface="맑은 고딕"/>
+                <a:ea typeface="맑은 고딕"/>
+                <a:cs typeface="맑은 고딕"/>
               </a:rPr>
               <a:t>비밀번호는 다르게 다뤄야 한다</a:t>
             </a:r>
@@ -8990,6 +9142,8 @@
                   <a:srgbClr val="14213D"/>
                 </a:solidFill>
                 <a:latin typeface="맑은 고딕"/>
+                <a:ea typeface="맑은 고딕"/>
+                <a:cs typeface="맑은 고딕"/>
               </a:rPr>
               <a:t>02</a:t>
             </a:r>
@@ -9025,6 +9179,8 @@
                   <a:srgbClr val="14B8A6"/>
                 </a:solidFill>
                 <a:latin typeface="맑은 고딕"/>
+                <a:ea typeface="맑은 고딕"/>
+                <a:cs typeface="맑은 고딕"/>
               </a:rPr>
               <a:t>PART 2 · Secret</a:t>
             </a:r>
@@ -9060,6 +9216,8 @@
                   <a:srgbClr val="FFFFFF"/>
                 </a:solidFill>
                 <a:latin typeface="맑은 고딕"/>
+                <a:ea typeface="맑은 고딕"/>
+                <a:cs typeface="맑은 고딕"/>
               </a:rPr>
               <a:t>Secret = ConfigMap의 '보안 버전'</a:t>
             </a:r>
@@ -9099,6 +9257,8 @@
                   <a:srgbClr val="0D9488"/>
                 </a:solidFill>
                 <a:latin typeface="맑은 고딕"/>
+                <a:ea typeface="맑은 고딕"/>
+                <a:cs typeface="맑은 고딕"/>
               </a:rPr>
               <a:t>●  </a:t>
             </a:r>
@@ -9108,6 +9268,8 @@
                   <a:srgbClr val="222733"/>
                 </a:solidFill>
                 <a:latin typeface="맑은 고딕"/>
+                <a:ea typeface="맑은 고딕"/>
+                <a:cs typeface="맑은 고딕"/>
               </a:rPr>
               <a:t>사용법은 ConfigMap과 거의 동일 (kubectl create secret ...)</a:t>
             </a:r>
@@ -9124,6 +9286,8 @@
                   <a:srgbClr val="0D9488"/>
                 </a:solidFill>
                 <a:latin typeface="맑은 고딕"/>
+                <a:ea typeface="맑은 고딕"/>
+                <a:cs typeface="맑은 고딕"/>
               </a:rPr>
               <a:t>●  </a:t>
             </a:r>
@@ -9133,6 +9297,8 @@
                   <a:srgbClr val="222733"/>
                 </a:solidFill>
                 <a:latin typeface="맑은 고딕"/>
+                <a:ea typeface="맑은 고딕"/>
+                <a:cs typeface="맑은 고딕"/>
               </a:rPr>
               <a:t>다만 값이 Base64로 인코딩되어 저장되고, 접근 권한을 더 엄격히 통제할 수 있음</a:t>
             </a:r>
@@ -9149,6 +9315,8 @@
                   <a:srgbClr val="0D9488"/>
                 </a:solidFill>
                 <a:latin typeface="맑은 고딕"/>
+                <a:ea typeface="맑은 고딕"/>
+                <a:cs typeface="맑은 고딕"/>
               </a:rPr>
               <a:t>●  </a:t>
             </a:r>
@@ -9158,6 +9326,8 @@
                   <a:srgbClr val="222733"/>
                 </a:solidFill>
                 <a:latin typeface="맑은 고딕"/>
+                <a:ea typeface="맑은 고딕"/>
+                <a:cs typeface="맑은 고딕"/>
               </a:rPr>
               <a:t>DB 비밀번호, API 키, 인증서 같은 민감한 정보에 사용</a:t>
             </a:r>
@@ -9237,6 +9407,8 @@
                   <a:srgbClr val="FFFFFF"/>
                 </a:solidFill>
                 <a:latin typeface="맑은 고딕"/>
+                <a:ea typeface="맑은 고딕"/>
+                <a:cs typeface="맑은 고딕"/>
               </a:rPr>
               <a:t>⚠  Base64는 암호화가 아니다</a:t>
             </a:r>
@@ -9272,6 +9444,8 @@
                   <a:srgbClr val="FFFFFF"/>
                 </a:solidFill>
                 <a:latin typeface="맑은 고딕"/>
+                <a:ea typeface="맑은 고딕"/>
+                <a:cs typeface="맑은 고딕"/>
               </a:rPr>
               <a:t>Base64는 '인코딩'일 뿐이라 누구나 디코딩 가능 — 진짜 보안은 접근권한 관리로 확보한다</a:t>
             </a:r>
@@ -9307,6 +9481,8 @@
                   <a:srgbClr val="5B6373"/>
                 </a:solidFill>
                 <a:latin typeface="맑은 고딕"/>
+                <a:ea typeface="맑은 고딕"/>
+                <a:cs typeface="맑은 고딕"/>
               </a:rPr>
               <a:t>클라우드인프라관리  ·  6주차 1차시</a:t>
             </a:r>
@@ -9342,6 +9518,8 @@
                   <a:srgbClr val="5B6373"/>
                 </a:solidFill>
                 <a:latin typeface="맑은 고딕"/>
+                <a:ea typeface="맑은 고딕"/>
+                <a:cs typeface="맑은 고딕"/>
               </a:rPr>
               <a:t>08 / 12</a:t>
             </a:r>
@@ -9545,6 +9723,8 @@
                   <a:srgbClr val="14213D"/>
                 </a:solidFill>
                 <a:latin typeface="맑은 고딕"/>
+                <a:ea typeface="맑은 고딕"/>
+                <a:cs typeface="맑은 고딕"/>
               </a:rPr>
               <a:t>03</a:t>
             </a:r>
@@ -9580,6 +9760,8 @@
                   <a:srgbClr val="14B8A6"/>
                 </a:solidFill>
                 <a:latin typeface="맑은 고딕"/>
+                <a:ea typeface="맑은 고딕"/>
+                <a:cs typeface="맑은 고딕"/>
               </a:rPr>
               <a:t>실습 안내</a:t>
             </a:r>
@@ -9615,6 +9797,8 @@
                   <a:srgbClr val="FFFFFF"/>
                 </a:solidFill>
                 <a:latin typeface="맑은 고딕"/>
+                <a:ea typeface="맑은 고딕"/>
+                <a:cs typeface="맑은 고딕"/>
               </a:rPr>
               <a:t>Killercoda — Secret 환경변수 실습</a:t>
             </a:r>
@@ -9654,6 +9838,8 @@
                   <a:srgbClr val="0D9488"/>
                 </a:solidFill>
                 <a:latin typeface="맑은 고딕"/>
+                <a:ea typeface="맑은 고딕"/>
+                <a:cs typeface="맑은 고딕"/>
               </a:rPr>
               <a:t>●  </a:t>
             </a:r>
@@ -9663,6 +9849,8 @@
                   <a:srgbClr val="222733"/>
                 </a:solidFill>
                 <a:latin typeface="맑은 고딕"/>
+                <a:ea typeface="맑은 고딕"/>
+                <a:cs typeface="맑은 고딕"/>
               </a:rPr>
               <a:t>교수자가 미리 생성해 둔 Secret 확인 (kubectl get secret)</a:t>
             </a:r>
@@ -9679,6 +9867,8 @@
                   <a:srgbClr val="0D9488"/>
                 </a:solidFill>
                 <a:latin typeface="맑은 고딕"/>
+                <a:ea typeface="맑은 고딕"/>
+                <a:cs typeface="맑은 고딕"/>
               </a:rPr>
               <a:t>●  </a:t>
             </a:r>
@@ -9688,6 +9878,8 @@
                   <a:srgbClr val="222733"/>
                 </a:solidFill>
                 <a:latin typeface="맑은 고딕"/>
+                <a:ea typeface="맑은 고딕"/>
+                <a:cs typeface="맑은 고딕"/>
               </a:rPr>
               <a:t>그 Secret 값을 환경변수로 불러오는 Pod YAML 작성</a:t>
             </a:r>
@@ -9704,6 +9896,8 @@
                   <a:srgbClr val="0D9488"/>
                 </a:solidFill>
                 <a:latin typeface="맑은 고딕"/>
+                <a:ea typeface="맑은 고딕"/>
+                <a:cs typeface="맑은 고딕"/>
               </a:rPr>
               <a:t>●  </a:t>
             </a:r>
@@ -9713,6 +9907,8 @@
                   <a:srgbClr val="222733"/>
                 </a:solidFill>
                 <a:latin typeface="맑은 고딕"/>
+                <a:ea typeface="맑은 고딕"/>
+                <a:cs typeface="맑은 고딕"/>
               </a:rPr>
               <a:t>kubectl apply 후 kubectl exec로 Pod 안에 들어가 env 명령으로 값 확인</a:t>
             </a:r>
@@ -9748,6 +9944,8 @@
                   <a:srgbClr val="5B6373"/>
                 </a:solidFill>
                 <a:latin typeface="맑은 고딕"/>
+                <a:ea typeface="맑은 고딕"/>
+                <a:cs typeface="맑은 고딕"/>
               </a:rPr>
               <a:t>클라우드인프라관리  ·  6주차 1차시</a:t>
             </a:r>
@@ -9783,6 +9981,8 @@
                   <a:srgbClr val="5B6373"/>
                 </a:solidFill>
                 <a:latin typeface="맑은 고딕"/>
+                <a:ea typeface="맑은 고딕"/>
+                <a:cs typeface="맑은 고딕"/>
               </a:rPr>
               <a:t>09 / 12</a:t>
             </a:r>

--- a/class/cloud_infra_mgmt/06주차_Kubernetes핵심2/01_강의자료/1차시_ConfigMap과Secret.pptx
+++ b/class/cloud_infra_mgmt/06주차_Kubernetes핵심2/01_강의자료/1차시_ConfigMap과Secret.pptx
@@ -9841,18 +9841,25 @@
                 <a:ea typeface="맑은 고딕"/>
                 <a:cs typeface="맑은 고딕"/>
               </a:rPr>
-              <a:t>●  </a:t>
-            </a:r>
-            <a:r>
-              <a:rPr sz="1700" b="0">
-                <a:solidFill>
-                  <a:srgbClr val="222733"/>
+              <a:t>●  kubectl create configmap, kubectl create secret generic으로 직접 생성</a:t>
+            </a:r>
+          </a:p>
+          <a:p>
+            <a:pPr>
+              <a:lnSpc>
+                <a:spcPct val="149500"/>
+              </a:lnSpc>
+            </a:pPr>
+            <a:r>
+              <a:rPr sz="1700" b="1">
+                <a:solidFill>
+                  <a:srgbClr val="0D9488"/>
                 </a:solidFill>
                 <a:latin typeface="맑은 고딕"/>
                 <a:ea typeface="맑은 고딕"/>
                 <a:cs typeface="맑은 고딕"/>
               </a:rPr>
-              <a:t>교수자가 미리 생성해 둔 Secret 확인 (kubectl get secret)</a:t>
+              <a:t>●  kubectl get secret ... -o jsonpath로 값 꺼내 base64 -d로 디코딩 (암호화 아님 확인)</a:t>
             </a:r>
           </a:p>
           <a:p>
